--- a/classes/parte-1-redes-y-seguridad-de-redes/027-analisis-de-trafico-filtros-seguimiento-de-flujos-y-estadisticas/clase-027-presentacion.pptx
+++ b/classes/parte-1-redes-y-seguridad-de-redes/027-analisis-de-trafico-filtros-seguimiento-de-flujos-y-estadisticas/clase-027-presentacion.pptx
@@ -17,6 +17,9 @@
     <p:sldId id="265" r:id="rId16"/>
     <p:sldId id="266" r:id="rId17"/>
     <p:sldId id="267" r:id="rId18"/>
+    <p:sldId id="268" r:id="rId19"/>
+    <p:sldId id="269" r:id="rId20"/>
+    <p:sldId id="270" r:id="rId21"/>
   </p:sldIdLst>
   <p:sldSz cx="9144000" cy="6858000" type="screen4x3"/>
   <p:notesSz cx="6858000" cy="9144000"/>
@@ -3198,7 +3201,7 @@
                   <a:srgbClr val="0B3D2E"/>
                 </a:solidFill>
               </a:rPr>
-              <a:t>⚠️ Errores comunes</a:t>
+              <a:t>✍️ Ejercicios</a:t>
             </a:r>
           </a:p>
         </p:txBody>
@@ -3236,67 +3239,82 @@
                   <a:srgbClr val="22282E"/>
                 </a:solidFill>
               </a:rPr>
-              <a:t>•  Campo del filtro en rojo — Sintaxis o nombre de campo inválido; consulta el Display Filter Reference</a:t>
-            </a:r>
-          </a:p>
-          <a:p>
-            <a:pPr>
-              <a:spcAft>
-                <a:spcPts val="600"/>
-              </a:spcAft>
-            </a:pPr>
-            <a:r>
-              <a:rPr sz="1500">
-                <a:solidFill>
-                  <a:srgbClr val="22282E"/>
-                </a:solidFill>
-              </a:rPr>
-              <a:t>•  Follow Stream muestra basura — Es tráfico cifrado (TLS); necesitas las claves de sesión para descifrar</a:t>
-            </a:r>
-          </a:p>
-          <a:p>
-            <a:pPr>
-              <a:spcAft>
-                <a:spcPts val="600"/>
-              </a:spcAft>
-            </a:pPr>
-            <a:r>
-              <a:rPr sz="1500">
-                <a:solidFill>
-                  <a:srgbClr val="22282E"/>
-                </a:solidFill>
-              </a:rPr>
-              <a:t>•  Muchas "retransmisiones" falsas — Capturaste en el emisor con offloading; puede ser reordenamiento, no pérdida real</a:t>
-            </a:r>
-          </a:p>
-          <a:p>
-            <a:pPr>
-              <a:spcAft>
-                <a:spcPts val="600"/>
-              </a:spcAft>
-            </a:pPr>
-            <a:r>
-              <a:rPr sz="1500">
-                <a:solidFill>
-                  <a:srgbClr val="22282E"/>
-                </a:solidFill>
-              </a:rPr>
-              <a:t>•  Estadísticas vacías — Tienes un filtro de visualización que no aplicaste o "Limit to display filter" activo sin coincidencias</a:t>
-            </a:r>
-          </a:p>
-          <a:p>
-            <a:pPr>
-              <a:spcAft>
-                <a:spcPts val="600"/>
-              </a:spcAft>
-            </a:pPr>
-            <a:r>
-              <a:rPr sz="1500">
-                <a:solidFill>
-                  <a:srgbClr val="22282E"/>
-                </a:solidFill>
-              </a:rPr>
-              <a:t>•  tshark no encuentra campos — Nombre de campo mal escrito; usa tshark -G fields \</a:t>
+              <a:t>•  Escribe un filtro que muestre solo tráfico TLS handshake (tls.handshake.type == 1).</a:t>
+            </a:r>
+          </a:p>
+          <a:p>
+            <a:pPr>
+              <a:spcAft>
+                <a:spcPts val="600"/>
+              </a:spcAft>
+            </a:pPr>
+            <a:r>
+              <a:rPr sz="1500">
+                <a:solidFill>
+                  <a:srgbClr val="22282E"/>
+                </a:solidFill>
+              </a:rPr>
+              <a:t>•  Encuentra todas las conversaciones que superen 100 KB y anótalas.</a:t>
+            </a:r>
+          </a:p>
+          <a:p>
+            <a:pPr>
+              <a:spcAft>
+                <a:spcPts val="600"/>
+              </a:spcAft>
+            </a:pPr>
+            <a:r>
+              <a:rPr sz="1500">
+                <a:solidFill>
+                  <a:srgbClr val="22282E"/>
+                </a:solidFill>
+              </a:rPr>
+              <a:t>•  Usa tcp.analysis.flags para listar todos los eventos de análisis de la captura.</a:t>
+            </a:r>
+          </a:p>
+          <a:p>
+            <a:pPr>
+              <a:spcAft>
+                <a:spcPts val="600"/>
+              </a:spcAft>
+            </a:pPr>
+            <a:r>
+              <a:rPr sz="1500">
+                <a:solidFill>
+                  <a:srgbClr val="22282E"/>
+                </a:solidFill>
+              </a:rPr>
+              <a:t>•  Con Follow HTTP Stream, extrae el Server: de la respuesta de un sitio.</a:t>
+            </a:r>
+          </a:p>
+          <a:p>
+            <a:pPr>
+              <a:spcAft>
+                <a:spcPts val="600"/>
+              </a:spcAft>
+            </a:pPr>
+            <a:r>
+              <a:rPr sz="1500">
+                <a:solidFill>
+                  <a:srgbClr val="22282E"/>
+                </a:solidFill>
+              </a:rPr>
+              <a:t>•  Calcula el RTT medio de un flujo añadiendo la columna tcp.analysis.ackrtt.</a:t>
+            </a:r>
+          </a:p>
+          <a:p>
+            <a:pPr>
+              <a:spcAft>
+                <a:spcPts val="600"/>
+              </a:spcAft>
+            </a:pPr>
+            <a:r>
+              <a:rPr sz="1500">
+                <a:solidFill>
+                  <a:srgbClr val="22282E"/>
+                </a:solidFill>
+              </a:rPr>
+              <a:t>•  Reproduce la tabla de Endpoints en consola: tshark -r lab027.pcapng -q -z endpoints,ip.</a:t>
             </a:r>
           </a:p>
         </p:txBody>
@@ -3347,7 +3365,7 @@
                   <a:srgbClr val="0B3D2E"/>
                 </a:solidFill>
               </a:rPr>
-              <a:t>❓ Preguntas frecuentes</a:t>
+              <a:t>📝 Reto verificable</a:t>
             </a:r>
           </a:p>
         </p:txBody>
@@ -3385,97 +3403,22 @@
                   <a:srgbClr val="22282E"/>
                 </a:solidFill>
               </a:rPr>
-              <a:t>•  ❓ ¿ip.addr == x o ip.src == x?</a:t>
-            </a:r>
-          </a:p>
-          <a:p>
-            <a:pPr>
-              <a:spcAft>
-                <a:spcPts val="600"/>
-              </a:spcAft>
-            </a:pPr>
-            <a:r>
-              <a:rPr sz="1500">
-                <a:solidFill>
-                  <a:srgbClr val="22282E"/>
-                </a:solidFill>
-              </a:rPr>
-              <a:t>•  ip.addr coincide si x es origen o destino; ip.src/ip.dst fijan la dirección. Ojo con la negación: usa !(ip.addr == x) en lugar de ip.addr != x.</a:t>
-            </a:r>
-          </a:p>
-          <a:p>
-            <a:pPr>
-              <a:spcAft>
-                <a:spcPts val="600"/>
-              </a:spcAft>
-            </a:pPr>
-            <a:r>
-              <a:rPr sz="1500">
-                <a:solidFill>
-                  <a:srgbClr val="22282E"/>
-                </a:solidFill>
-              </a:rPr>
-              <a:t>•  ❓ ¿Puedo descifrar TLS en Follow Stream?</a:t>
-            </a:r>
-          </a:p>
-          <a:p>
-            <a:pPr>
-              <a:spcAft>
-                <a:spcPts val="600"/>
-              </a:spcAft>
-            </a:pPr>
-            <a:r>
-              <a:rPr sz="1500">
-                <a:solidFill>
-                  <a:srgbClr val="22282E"/>
-                </a:solidFill>
-              </a:rPr>
-              <a:t>•  Sí, si dispones del archivo de claves (variable SSLKEYLOGFILE en el cliente) o de la clave privada RSA sin PFS. Se configura en Preferencias → Protocols → TLS.</a:t>
-            </a:r>
-          </a:p>
-          <a:p>
-            <a:pPr>
-              <a:spcAft>
-                <a:spcPts val="600"/>
-              </a:spcAft>
-            </a:pPr>
-            <a:r>
-              <a:rPr sz="1500">
-                <a:solidFill>
-                  <a:srgbClr val="22282E"/>
-                </a:solidFill>
-              </a:rPr>
-              <a:t>•  ❓ ¿Qué diferencia hay entre Conversations y Endpoints?</a:t>
-            </a:r>
-          </a:p>
-          <a:p>
-            <a:pPr>
-              <a:spcAft>
-                <a:spcPts val="600"/>
-              </a:spcAft>
-            </a:pPr>
-            <a:r>
-              <a:rPr sz="1500">
-                <a:solidFill>
-                  <a:srgbClr val="22282E"/>
-                </a:solidFill>
-              </a:rPr>
-              <a:t>•  Conversations agrupa por pares (A↔B); Endpoints agrupa por host individual con su total de tráfico.</a:t>
-            </a:r>
-          </a:p>
-          <a:p>
-            <a:pPr>
-              <a:spcAft>
-                <a:spcPts val="600"/>
-              </a:spcAft>
-            </a:pPr>
-            <a:r>
-              <a:rPr sz="1500">
-                <a:solidFill>
-                  <a:srgbClr val="22282E"/>
-                </a:solidFill>
-              </a:rPr>
-              <a:t>•  ❓ ¿Cómo cuento paquetes que cumplen un filtro sin abrir la GUI?</a:t>
+              <a:t>•  Dada una captura con al menos 5 conversaciones, entrega un informe corto (media página) que identifique: la conversación con más bytes, el número de retransmisiones totales, el protocolo de…</a:t>
+            </a:r>
+          </a:p>
+          <a:p>
+            <a:pPr>
+              <a:spcAft>
+                <a:spcPts val="600"/>
+              </a:spcAft>
+            </a:pPr>
+            <a:r>
+              <a:rPr sz="1500">
+                <a:solidFill>
+                  <a:srgbClr val="22282E"/>
+                </a:solidFill>
+              </a:rPr>
+              <a:t>•  Criterio de aceptación: los números del informe coinciden con los que el revisor obtiene al aplicar tcp.analysis.retransmission y abrir la tabla de Conversaciones sobre la misma captura.</a:t>
             </a:r>
           </a:p>
         </p:txBody>
@@ -3526,7 +3469,7 @@
                   <a:srgbClr val="0B3D2E"/>
                 </a:solidFill>
               </a:rPr>
-              <a:t>🔗 Referencias</a:t>
+              <a:t>⚠️ Errores comunes</a:t>
             </a:r>
           </a:p>
         </p:txBody>
@@ -3564,6 +3507,334 @@
                   <a:srgbClr val="22282E"/>
                 </a:solidFill>
               </a:rPr>
+              <a:t>•  Campo del filtro en rojo — Sintaxis o nombre de campo inválido; consulta el Display Filter Reference</a:t>
+            </a:r>
+          </a:p>
+          <a:p>
+            <a:pPr>
+              <a:spcAft>
+                <a:spcPts val="600"/>
+              </a:spcAft>
+            </a:pPr>
+            <a:r>
+              <a:rPr sz="1500">
+                <a:solidFill>
+                  <a:srgbClr val="22282E"/>
+                </a:solidFill>
+              </a:rPr>
+              <a:t>•  Follow Stream muestra basura — Es tráfico cifrado (TLS); necesitas las claves de sesión para descifrar</a:t>
+            </a:r>
+          </a:p>
+          <a:p>
+            <a:pPr>
+              <a:spcAft>
+                <a:spcPts val="600"/>
+              </a:spcAft>
+            </a:pPr>
+            <a:r>
+              <a:rPr sz="1500">
+                <a:solidFill>
+                  <a:srgbClr val="22282E"/>
+                </a:solidFill>
+              </a:rPr>
+              <a:t>•  Muchas "retransmisiones" falsas — Capturaste en el emisor con offloading; puede ser reordenamiento, no pérdida real</a:t>
+            </a:r>
+          </a:p>
+          <a:p>
+            <a:pPr>
+              <a:spcAft>
+                <a:spcPts val="600"/>
+              </a:spcAft>
+            </a:pPr>
+            <a:r>
+              <a:rPr sz="1500">
+                <a:solidFill>
+                  <a:srgbClr val="22282E"/>
+                </a:solidFill>
+              </a:rPr>
+              <a:t>•  Estadísticas vacías — Tienes un filtro de visualización que no aplicaste o "Limit to display filter" activo sin coincidencias</a:t>
+            </a:r>
+          </a:p>
+          <a:p>
+            <a:pPr>
+              <a:spcAft>
+                <a:spcPts val="600"/>
+              </a:spcAft>
+            </a:pPr>
+            <a:r>
+              <a:rPr sz="1500">
+                <a:solidFill>
+                  <a:srgbClr val="22282E"/>
+                </a:solidFill>
+              </a:rPr>
+              <a:t>•  tshark no encuentra campos — Nombre de campo mal escrito; usa tshark -G fields \</a:t>
+            </a:r>
+          </a:p>
+        </p:txBody>
+      </p:sp>
+    </p:spTree>
+  </p:cSld>
+  <p:clrMapOvr>
+    <a:masterClrMapping/>
+  </p:clrMapOvr>
+</p:sld>
+</file>
+
+<file path=ppt/slides/slide13.xml><?xml version="1.0" encoding="utf-8"?>
+<p:sld xmlns:a="http://schemas.openxmlformats.org/drawingml/2006/main" xmlns:p="http://schemas.openxmlformats.org/presentationml/2006/main" xmlns:r="http://schemas.openxmlformats.org/officeDocument/2006/relationships">
+  <p:cSld>
+    <p:spTree>
+      <p:nvGrpSpPr>
+        <p:cNvPr id="1" name=""/>
+        <p:cNvGrpSpPr/>
+        <p:nvPr/>
+      </p:nvGrpSpPr>
+      <p:grpSpPr/>
+      <p:sp>
+        <p:nvSpPr>
+          <p:cNvPr id="2" name="TextBox 1"/>
+          <p:cNvSpPr txBox="1"/>
+          <p:nvPr/>
+        </p:nvSpPr>
+        <p:spPr>
+          <a:xfrm>
+            <a:off x="457200" y="320040"/>
+            <a:ext cx="8229600" cy="822960"/>
+          </a:xfrm>
+          <a:prstGeom prst="rect">
+            <a:avLst/>
+          </a:prstGeom>
+          <a:noFill/>
+        </p:spPr>
+        <p:txBody>
+          <a:bodyPr wrap="square">
+            <a:spAutoFit/>
+          </a:bodyPr>
+          <a:lstStyle/>
+          <a:p>
+            <a:r>
+              <a:rPr sz="2600" b="1">
+                <a:solidFill>
+                  <a:srgbClr val="0B3D2E"/>
+                </a:solidFill>
+              </a:rPr>
+              <a:t>❓ Preguntas frecuentes</a:t>
+            </a:r>
+          </a:p>
+        </p:txBody>
+      </p:sp>
+      <p:sp>
+        <p:nvSpPr>
+          <p:cNvPr id="3" name="TextBox 2"/>
+          <p:cNvSpPr txBox="1"/>
+          <p:nvPr/>
+        </p:nvSpPr>
+        <p:spPr>
+          <a:xfrm>
+            <a:off x="457200" y="1280160"/>
+            <a:ext cx="8229600" cy="4937760"/>
+          </a:xfrm>
+          <a:prstGeom prst="rect">
+            <a:avLst/>
+          </a:prstGeom>
+          <a:noFill/>
+        </p:spPr>
+        <p:txBody>
+          <a:bodyPr wrap="square">
+            <a:spAutoFit/>
+          </a:bodyPr>
+          <a:lstStyle/>
+          <a:p>
+            <a:pPr>
+              <a:spcAft>
+                <a:spcPts val="600"/>
+              </a:spcAft>
+            </a:pPr>
+            <a:r>
+              <a:rPr sz="1500">
+                <a:solidFill>
+                  <a:srgbClr val="22282E"/>
+                </a:solidFill>
+              </a:rPr>
+              <a:t>•  ❓ ¿ip.addr == x o ip.src == x?</a:t>
+            </a:r>
+          </a:p>
+          <a:p>
+            <a:pPr>
+              <a:spcAft>
+                <a:spcPts val="600"/>
+              </a:spcAft>
+            </a:pPr>
+            <a:r>
+              <a:rPr sz="1500">
+                <a:solidFill>
+                  <a:srgbClr val="22282E"/>
+                </a:solidFill>
+              </a:rPr>
+              <a:t>•  ip.addr coincide si x es origen o destino; ip.src/ip.dst fijan la dirección. Ojo con la negación: usa !(ip.addr == x) en lugar de ip.addr != x.</a:t>
+            </a:r>
+          </a:p>
+          <a:p>
+            <a:pPr>
+              <a:spcAft>
+                <a:spcPts val="600"/>
+              </a:spcAft>
+            </a:pPr>
+            <a:r>
+              <a:rPr sz="1500">
+                <a:solidFill>
+                  <a:srgbClr val="22282E"/>
+                </a:solidFill>
+              </a:rPr>
+              <a:t>•  ❓ ¿Puedo descifrar TLS en Follow Stream?</a:t>
+            </a:r>
+          </a:p>
+          <a:p>
+            <a:pPr>
+              <a:spcAft>
+                <a:spcPts val="600"/>
+              </a:spcAft>
+            </a:pPr>
+            <a:r>
+              <a:rPr sz="1500">
+                <a:solidFill>
+                  <a:srgbClr val="22282E"/>
+                </a:solidFill>
+              </a:rPr>
+              <a:t>•  Sí, si dispones del archivo de claves (variable SSLKEYLOGFILE en el cliente) o de la clave privada RSA sin PFS. Se configura en Preferencias → Protocols → TLS.</a:t>
+            </a:r>
+          </a:p>
+          <a:p>
+            <a:pPr>
+              <a:spcAft>
+                <a:spcPts val="600"/>
+              </a:spcAft>
+            </a:pPr>
+            <a:r>
+              <a:rPr sz="1500">
+                <a:solidFill>
+                  <a:srgbClr val="22282E"/>
+                </a:solidFill>
+              </a:rPr>
+              <a:t>•  ❓ ¿Qué diferencia hay entre Conversations y Endpoints?</a:t>
+            </a:r>
+          </a:p>
+          <a:p>
+            <a:pPr>
+              <a:spcAft>
+                <a:spcPts val="600"/>
+              </a:spcAft>
+            </a:pPr>
+            <a:r>
+              <a:rPr sz="1500">
+                <a:solidFill>
+                  <a:srgbClr val="22282E"/>
+                </a:solidFill>
+              </a:rPr>
+              <a:t>•  Conversations agrupa por pares (A↔B); Endpoints agrupa por host individual con su total de tráfico.</a:t>
+            </a:r>
+          </a:p>
+          <a:p>
+            <a:pPr>
+              <a:spcAft>
+                <a:spcPts val="600"/>
+              </a:spcAft>
+            </a:pPr>
+            <a:r>
+              <a:rPr sz="1500">
+                <a:solidFill>
+                  <a:srgbClr val="22282E"/>
+                </a:solidFill>
+              </a:rPr>
+              <a:t>•  ❓ ¿Cómo cuento paquetes que cumplen un filtro sin abrir la GUI?</a:t>
+            </a:r>
+          </a:p>
+        </p:txBody>
+      </p:sp>
+    </p:spTree>
+  </p:cSld>
+  <p:clrMapOvr>
+    <a:masterClrMapping/>
+  </p:clrMapOvr>
+</p:sld>
+</file>
+
+<file path=ppt/slides/slide14.xml><?xml version="1.0" encoding="utf-8"?>
+<p:sld xmlns:a="http://schemas.openxmlformats.org/drawingml/2006/main" xmlns:p="http://schemas.openxmlformats.org/presentationml/2006/main" xmlns:r="http://schemas.openxmlformats.org/officeDocument/2006/relationships">
+  <p:cSld>
+    <p:spTree>
+      <p:nvGrpSpPr>
+        <p:cNvPr id="1" name=""/>
+        <p:cNvGrpSpPr/>
+        <p:nvPr/>
+      </p:nvGrpSpPr>
+      <p:grpSpPr/>
+      <p:sp>
+        <p:nvSpPr>
+          <p:cNvPr id="2" name="TextBox 1"/>
+          <p:cNvSpPr txBox="1"/>
+          <p:nvPr/>
+        </p:nvSpPr>
+        <p:spPr>
+          <a:xfrm>
+            <a:off x="457200" y="320040"/>
+            <a:ext cx="8229600" cy="822960"/>
+          </a:xfrm>
+          <a:prstGeom prst="rect">
+            <a:avLst/>
+          </a:prstGeom>
+          <a:noFill/>
+        </p:spPr>
+        <p:txBody>
+          <a:bodyPr wrap="square">
+            <a:spAutoFit/>
+          </a:bodyPr>
+          <a:lstStyle/>
+          <a:p>
+            <a:r>
+              <a:rPr sz="2600" b="1">
+                <a:solidFill>
+                  <a:srgbClr val="0B3D2E"/>
+                </a:solidFill>
+              </a:rPr>
+              <a:t>🔗 Referencias</a:t>
+            </a:r>
+          </a:p>
+        </p:txBody>
+      </p:sp>
+      <p:sp>
+        <p:nvSpPr>
+          <p:cNvPr id="3" name="TextBox 2"/>
+          <p:cNvSpPr txBox="1"/>
+          <p:nvPr/>
+        </p:nvSpPr>
+        <p:spPr>
+          <a:xfrm>
+            <a:off x="457200" y="1280160"/>
+            <a:ext cx="8229600" cy="4937760"/>
+          </a:xfrm>
+          <a:prstGeom prst="rect">
+            <a:avLst/>
+          </a:prstGeom>
+          <a:noFill/>
+        </p:spPr>
+        <p:txBody>
+          <a:bodyPr wrap="square">
+            <a:spAutoFit/>
+          </a:bodyPr>
+          <a:lstStyle/>
+          <a:p>
+            <a:pPr>
+              <a:spcAft>
+                <a:spcPts val="600"/>
+              </a:spcAft>
+            </a:pPr>
+            <a:r>
+              <a:rPr sz="1500">
+                <a:solidFill>
+                  <a:srgbClr val="22282E"/>
+                </a:solidFill>
+              </a:rPr>
               <a:t>•  Sanders, C. Practical Packet Analysis, 3rd ed., cap. 5–6. No Starch Press.</a:t>
             </a:r>
           </a:p>
@@ -3614,6 +3885,81 @@
           </a:p>
         </p:txBody>
       </p:sp>
+    </p:spTree>
+  </p:cSld>
+  <p:clrMapOvr>
+    <a:masterClrMapping/>
+  </p:clrMapOvr>
+</p:sld>
+</file>
+
+<file path=ppt/slides/slide15.xml><?xml version="1.0" encoding="utf-8"?>
+<p:sld xmlns:a="http://schemas.openxmlformats.org/drawingml/2006/main" xmlns:p="http://schemas.openxmlformats.org/presentationml/2006/main" xmlns:r="http://schemas.openxmlformats.org/officeDocument/2006/relationships">
+  <p:cSld>
+    <p:spTree>
+      <p:nvGrpSpPr>
+        <p:cNvPr id="1" name=""/>
+        <p:cNvGrpSpPr/>
+        <p:nvPr/>
+      </p:nvGrpSpPr>
+      <p:grpSpPr/>
+      <p:sp>
+        <p:nvSpPr>
+          <p:cNvPr id="2" name="TextBox 1"/>
+          <p:cNvSpPr txBox="1"/>
+          <p:nvPr/>
+        </p:nvSpPr>
+        <p:spPr>
+          <a:xfrm>
+            <a:off x="457200" y="274320"/>
+            <a:ext cx="8229600" cy="640080"/>
+          </a:xfrm>
+          <a:prstGeom prst="rect">
+            <a:avLst/>
+          </a:prstGeom>
+          <a:noFill/>
+        </p:spPr>
+        <p:txBody>
+          <a:bodyPr wrap="square">
+            <a:spAutoFit/>
+          </a:bodyPr>
+          <a:lstStyle/>
+          <a:p>
+            <a:r>
+              <a:rPr sz="2200" b="1">
+                <a:solidFill>
+                  <a:srgbClr val="0B3D2E"/>
+                </a:solidFill>
+              </a:rPr>
+              <a:t>Diagrama de la clase</a:t>
+            </a:r>
+          </a:p>
+        </p:txBody>
+      </p:sp>
+      <p:pic>
+        <p:nvPicPr>
+          <p:cNvPr id="3" name="Picture 2" descr="51dbc91d85e405f9.png"/>
+          <p:cNvPicPr>
+            <a:picLocks noChangeAspect="1"/>
+          </p:cNvPicPr>
+          <p:nvPr/>
+        </p:nvPicPr>
+        <p:blipFill>
+          <a:blip r:embed="rId2"/>
+          <a:stretch>
+            <a:fillRect/>
+          </a:stretch>
+        </p:blipFill>
+        <p:spPr>
+          <a:xfrm>
+            <a:off x="457200" y="3461004"/>
+            <a:ext cx="8229600" cy="576072"/>
+          </a:xfrm>
+          <a:prstGeom prst="rect">
+            <a:avLst/>
+          </a:prstGeom>
+        </p:spPr>
+      </p:pic>
     </p:spTree>
   </p:cSld>
   <p:clrMapOvr>
@@ -3698,7 +4044,7 @@
                   <a:srgbClr val="22282E"/>
                 </a:solidFill>
               </a:rPr>
-              <a:t>•  Dominar el lenguaje de filtros de visualización de Wireshark, el seguimiento de flujos (Follow Stream) y las herramientas estadísticas para pasar de miles de paquetes a una respuesta en segundos. El alumno aprenderá a formular preguntas precisas sobre una captura y a responderlas con expresiones y vistas agregadas.</a:t>
+              <a:t>•  Dominar el lenguaje de filtros de visualización de Wireshark, el seguimiento de flujos (Follow Stream) y las herramientas estadísticas para pasar de miles de paquetes a una respuesta en segundos. El…</a:t>
             </a:r>
           </a:p>
         </p:txBody>
@@ -4107,7 +4453,7 @@
                   <a:srgbClr val="0B3D2E"/>
                 </a:solidFill>
               </a:rPr>
-              <a:t>📖 Definiciones y características</a:t>
+              <a:t>🧠 Explicación en profundidad</a:t>
             </a:r>
           </a:p>
         </p:txBody>
@@ -4145,82 +4491,97 @@
                   <a:srgbClr val="22282E"/>
                 </a:solidFill>
               </a:rPr>
-              <a:t>•  Filtro de visualización: expresión booleana sobre campos disecados (ip.addr == 10.0.0.5 &amp;&amp; tcp.port == 443). No altera la captura, solo la vista.</a:t>
-            </a:r>
-          </a:p>
-          <a:p>
-            <a:pPr>
-              <a:spcAft>
-                <a:spcPts val="600"/>
-              </a:spcAft>
-            </a:pPr>
-            <a:r>
-              <a:rPr sz="1500">
-                <a:solidFill>
-                  <a:srgbClr val="22282E"/>
-                </a:solidFill>
-              </a:rPr>
-              <a:t>•  Flujo (stream): conjunto de paquetes de una misma conversación identificada por tcp.stream o udp.stream. Follow Stream reensambla su carga útil.</a:t>
-            </a:r>
-          </a:p>
-          <a:p>
-            <a:pPr>
-              <a:spcAft>
-                <a:spcPts val="600"/>
-              </a:spcAft>
-            </a:pPr>
-            <a:r>
-              <a:rPr sz="1500">
-                <a:solidFill>
-                  <a:srgbClr val="22282E"/>
-                </a:solidFill>
-              </a:rPr>
-              <a:t>•  Conversación: par de endpoints que intercambian paquetes; la tabla suma bytes, paquetes y duración.</a:t>
-            </a:r>
-          </a:p>
-          <a:p>
-            <a:pPr>
-              <a:spcAft>
-                <a:spcPts val="600"/>
-              </a:spcAft>
-            </a:pPr>
-            <a:r>
-              <a:rPr sz="1500">
-                <a:solidFill>
-                  <a:srgbClr val="22282E"/>
-                </a:solidFill>
-              </a:rPr>
-              <a:t>•  Retransmisión: reenvío de un segmento TCP no confirmado; señal de pérdida o congestión.</a:t>
-            </a:r>
-          </a:p>
-          <a:p>
-            <a:pPr>
-              <a:spcAft>
-                <a:spcPts val="600"/>
-              </a:spcAft>
-            </a:pPr>
-            <a:r>
-              <a:rPr sz="1500">
-                <a:solidFill>
-                  <a:srgbClr val="22282E"/>
-                </a:solidFill>
-              </a:rPr>
-              <a:t>•  Duplicate ACK: ACKs repetidos que indican huecos en la secuencia; preludio de retransmisión rápida.</a:t>
-            </a:r>
-          </a:p>
-          <a:p>
-            <a:pPr>
-              <a:spcAft>
-                <a:spcPts val="600"/>
-              </a:spcAft>
-            </a:pPr>
-            <a:r>
-              <a:rPr sz="1500">
-                <a:solidFill>
-                  <a:srgbClr val="22282E"/>
-                </a:solidFill>
-              </a:rPr>
-              <a:t>•  RTT (Round-Trip Time): tiempo entre un segmento y su ACK; base para medir latencia.</a:t>
+              <a:t>•  Escribir http en la barra de filtro no busca la palabra "http" en ninguna parte:</a:t>
+            </a:r>
+          </a:p>
+          <a:p>
+            <a:pPr>
+              <a:spcAft>
+                <a:spcPts val="600"/>
+              </a:spcAft>
+            </a:pPr>
+            <a:r>
+              <a:rPr sz="1500">
+                <a:solidFill>
+                  <a:srgbClr val="22282E"/>
+                </a:solidFill>
+              </a:rPr>
+              <a:t>•  evalúa la expresión booleana "este paquete tiene una capa HTTP". Entender que es un</a:t>
+            </a:r>
+          </a:p>
+          <a:p>
+            <a:pPr>
+              <a:spcAft>
+                <a:spcPts val="600"/>
+              </a:spcAft>
+            </a:pPr>
+            <a:r>
+              <a:rPr sz="1500">
+                <a:solidFill>
+                  <a:srgbClr val="22282E"/>
+                </a:solidFill>
+              </a:rPr>
+              <a:t>•  lenguaje con campos tipados cambia por completo lo que puedes pedirle. Cada campo que</a:t>
+            </a:r>
+          </a:p>
+          <a:p>
+            <a:pPr>
+              <a:spcAft>
+                <a:spcPts val="600"/>
+              </a:spcAft>
+            </a:pPr>
+            <a:r>
+              <a:rPr sz="1500">
+                <a:solidFill>
+                  <a:srgbClr val="22282E"/>
+                </a:solidFill>
+              </a:rPr>
+              <a:t>•  un disector produce es direccionable —ip.src, tcp.flags.syn, dns.qry.name,</a:t>
+            </a:r>
+          </a:p>
+          <a:p>
+            <a:pPr>
+              <a:spcAft>
+                <a:spcPts val="600"/>
+              </a:spcAft>
+            </a:pPr>
+            <a:r>
+              <a:rPr sz="1500">
+                <a:solidFill>
+                  <a:srgbClr val="22282E"/>
+                </a:solidFill>
+              </a:rPr>
+              <a:t>•  http.response.code— y Wireshark te dice el nombre exacto de cualquier campo si lo</a:t>
+            </a:r>
+          </a:p>
+          <a:p>
+            <a:pPr>
+              <a:spcAft>
+                <a:spcPts val="600"/>
+              </a:spcAft>
+            </a:pPr>
+            <a:r>
+              <a:rPr sz="1500">
+                <a:solidFill>
+                  <a:srgbClr val="22282E"/>
+                </a:solidFill>
+              </a:rPr>
+              <a:t>•  seleccionas en el panel de detalle y miras la barra de estado.</a:t>
+            </a:r>
+          </a:p>
+          <a:p>
+            <a:pPr>
+              <a:spcAft>
+                <a:spcPts val="600"/>
+              </a:spcAft>
+            </a:pPr>
+            <a:r>
+              <a:rPr sz="1500">
+                <a:solidFill>
+                  <a:srgbClr val="22282E"/>
+                </a:solidFill>
+              </a:rPr>
+              <a:t>•  Sobre esos campos operan comparadores (==, !=, &gt;, &lt;=), pertenencia a conjuntos</a:t>
             </a:r>
           </a:p>
         </p:txBody>
@@ -4271,7 +4632,7 @@
                   <a:srgbClr val="0B3D2E"/>
                 </a:solidFill>
               </a:rPr>
-              <a:t>🧰 Herramientas y preparación</a:t>
+              <a:t>📖 Definiciones y características</a:t>
             </a:r>
           </a:p>
         </p:txBody>
@@ -4309,82 +4670,82 @@
                   <a:srgbClr val="22282E"/>
                 </a:solidFill>
               </a:rPr>
-              <a:t>•  Wireshark 4.x y su binario de consola tshark.</a:t>
-            </a:r>
-          </a:p>
-          <a:p>
-            <a:pPr>
-              <a:spcAft>
-                <a:spcPts val="600"/>
-              </a:spcAft>
-            </a:pPr>
-            <a:r>
-              <a:rPr sz="1500">
-                <a:solidFill>
-                  <a:srgbClr val="22282E"/>
-                </a:solidFill>
-              </a:rPr>
-              <a:t>•  Una captura de práctica con varios flujos. Puedes generar una así en tu laboratorio:</a:t>
-            </a:r>
-          </a:p>
-          <a:p>
-            <a:pPr>
-              <a:spcAft>
-                <a:spcPts val="600"/>
-              </a:spcAft>
-            </a:pPr>
-            <a:r>
-              <a:rPr sz="1500">
-                <a:solidFill>
-                  <a:srgbClr val="22282E"/>
-                </a:solidFill>
-              </a:rPr>
-              <a:t>•  sudo tcpdump -i eth0 -w /tmp/lab027.pcapng &amp;</a:t>
-            </a:r>
-          </a:p>
-          <a:p>
-            <a:pPr>
-              <a:spcAft>
-                <a:spcPts val="600"/>
-              </a:spcAft>
-            </a:pPr>
-            <a:r>
-              <a:rPr sz="1500">
-                <a:solidFill>
-                  <a:srgbClr val="22282E"/>
-                </a:solidFill>
-              </a:rPr>
-              <a:t>•  curl http://192.168.56.101/ ; dig @192.168.56.1 example.com ; ping -c3 192.168.56.1</a:t>
-            </a:r>
-          </a:p>
-          <a:p>
-            <a:pPr>
-              <a:spcAft>
-                <a:spcPts val="600"/>
-              </a:spcAft>
-            </a:pPr>
-            <a:r>
-              <a:rPr sz="1500">
-                <a:solidFill>
-                  <a:srgbClr val="22282E"/>
-                </a:solidFill>
-              </a:rPr>
-              <a:t>•  sudo pkill tcpdump</a:t>
-            </a:r>
-          </a:p>
-          <a:p>
-            <a:pPr>
-              <a:spcAft>
-                <a:spcPts val="600"/>
-              </a:spcAft>
-            </a:pPr>
-            <a:r>
-              <a:rPr sz="1500">
-                <a:solidFill>
-                  <a:srgbClr val="22282E"/>
-                </a:solidFill>
-              </a:rPr>
-              <a:t>•  Referencia de campos: &lt;https://www.wireshark.org/docs/dfref/&gt;.</a:t>
+              <a:t>•  Filtro de visualización: expresión booleana sobre campos disecados (ip.addr == 10.0.0.5 &amp;&amp; tcp.port == 443). No altera la captura, solo la vista.</a:t>
+            </a:r>
+          </a:p>
+          <a:p>
+            <a:pPr>
+              <a:spcAft>
+                <a:spcPts val="600"/>
+              </a:spcAft>
+            </a:pPr>
+            <a:r>
+              <a:rPr sz="1500">
+                <a:solidFill>
+                  <a:srgbClr val="22282E"/>
+                </a:solidFill>
+              </a:rPr>
+              <a:t>•  Flujo (stream): conjunto de paquetes de una misma conversación identificada por tcp.stream o udp.stream. Follow Stream reensambla su carga útil.</a:t>
+            </a:r>
+          </a:p>
+          <a:p>
+            <a:pPr>
+              <a:spcAft>
+                <a:spcPts val="600"/>
+              </a:spcAft>
+            </a:pPr>
+            <a:r>
+              <a:rPr sz="1500">
+                <a:solidFill>
+                  <a:srgbClr val="22282E"/>
+                </a:solidFill>
+              </a:rPr>
+              <a:t>•  Conversación: par de endpoints que intercambian paquetes; la tabla suma bytes, paquetes y duración.</a:t>
+            </a:r>
+          </a:p>
+          <a:p>
+            <a:pPr>
+              <a:spcAft>
+                <a:spcPts val="600"/>
+              </a:spcAft>
+            </a:pPr>
+            <a:r>
+              <a:rPr sz="1500">
+                <a:solidFill>
+                  <a:srgbClr val="22282E"/>
+                </a:solidFill>
+              </a:rPr>
+              <a:t>•  Retransmisión: reenvío de un segmento TCP no confirmado; señal de pérdida o congestión.</a:t>
+            </a:r>
+          </a:p>
+          <a:p>
+            <a:pPr>
+              <a:spcAft>
+                <a:spcPts val="600"/>
+              </a:spcAft>
+            </a:pPr>
+            <a:r>
+              <a:rPr sz="1500">
+                <a:solidFill>
+                  <a:srgbClr val="22282E"/>
+                </a:solidFill>
+              </a:rPr>
+              <a:t>•  Duplicate ACK: ACKs repetidos que indican huecos en la secuencia; preludio de retransmisión rápida.</a:t>
+            </a:r>
+          </a:p>
+          <a:p>
+            <a:pPr>
+              <a:spcAft>
+                <a:spcPts val="600"/>
+              </a:spcAft>
+            </a:pPr>
+            <a:r>
+              <a:rPr sz="1500">
+                <a:solidFill>
+                  <a:srgbClr val="22282E"/>
+                </a:solidFill>
+              </a:rPr>
+              <a:t>•  RTT (Round-Trip Time): tiempo entre un segmento y su ACK; base para medir latencia.</a:t>
             </a:r>
           </a:p>
         </p:txBody>
@@ -4435,7 +4796,7 @@
                   <a:srgbClr val="0B3D2E"/>
                 </a:solidFill>
               </a:rPr>
-              <a:t>🧪 Laboratorio guiado</a:t>
+              <a:t>📔 Glosario</a:t>
             </a:r>
           </a:p>
         </p:txBody>
@@ -4473,97 +4834,97 @@
                   <a:srgbClr val="22282E"/>
                 </a:solidFill>
               </a:rPr>
-              <a:t>•  Abre lab027.pcapng. Aplica el filtro dns y observa consultas y respuestas.</a:t>
-            </a:r>
-          </a:p>
-          <a:p>
-            <a:pPr>
-              <a:spcAft>
-                <a:spcPts val="600"/>
-              </a:spcAft>
-            </a:pPr>
-            <a:r>
-              <a:rPr sz="1500">
-                <a:solidFill>
-                  <a:srgbClr val="22282E"/>
-                </a:solidFill>
-              </a:rPr>
-              <a:t>•  Filtra por método HTTP: http.request.method == "GET".</a:t>
-            </a:r>
-          </a:p>
-          <a:p>
-            <a:pPr>
-              <a:spcAft>
-                <a:spcPts val="600"/>
-              </a:spcAft>
-            </a:pPr>
-            <a:r>
-              <a:rPr sz="1500">
-                <a:solidFill>
-                  <a:srgbClr val="22282E"/>
-                </a:solidFill>
-              </a:rPr>
-              <a:t>•  Combina condiciones: ip.addr == 192.168.56.101 &amp;&amp; tcp.flags.syn == 1 &amp;&amp; tcp.flags.ack == 0 para ver intentos de conexión salientes.</a:t>
-            </a:r>
-          </a:p>
-          <a:p>
-            <a:pPr>
-              <a:spcAft>
-                <a:spcPts val="600"/>
-              </a:spcAft>
-            </a:pPr>
-            <a:r>
-              <a:rPr sz="1500">
-                <a:solidFill>
-                  <a:srgbClr val="22282E"/>
-                </a:solidFill>
-              </a:rPr>
-              <a:t>•  Sobre un paquete HTTP, clic derecho → Follow → HTTP Stream. Lee petición y respuesta reensambladas (cliente en rojo, servidor en azul).</a:t>
-            </a:r>
-          </a:p>
-          <a:p>
-            <a:pPr>
-              <a:spcAft>
-                <a:spcPts val="600"/>
-              </a:spcAft>
-            </a:pPr>
-            <a:r>
-              <a:rPr sz="1500">
-                <a:solidFill>
-                  <a:srgbClr val="22282E"/>
-                </a:solidFill>
-              </a:rPr>
-              <a:t>•  Cambia a Follow → TCP Stream del mismo flujo para ver bytes crudos y el tcp.stream asociado.</a:t>
-            </a:r>
-          </a:p>
-          <a:p>
-            <a:pPr>
-              <a:spcAft>
-                <a:spcPts val="600"/>
-              </a:spcAft>
-            </a:pPr>
-            <a:r>
-              <a:rPr sz="1500">
-                <a:solidFill>
-                  <a:srgbClr val="22282E"/>
-                </a:solidFill>
-              </a:rPr>
-              <a:t>•  Abre Estadísticas → Conversaciones. Ordena por bytes; marca "Limit to display filter" para acotar.</a:t>
-            </a:r>
-          </a:p>
-          <a:p>
-            <a:pPr>
-              <a:spcAft>
-                <a:spcPts val="600"/>
-              </a:spcAft>
-            </a:pPr>
-            <a:r>
-              <a:rPr sz="1500">
-                <a:solidFill>
-                  <a:srgbClr val="22282E"/>
-                </a:solidFill>
-              </a:rPr>
-              <a:t>•  Abre Estadísticas → Jerarquía de protocolos y anota el porcentaje de cada protocolo.</a:t>
+              <a:t>•  Término — Definición concisa</a:t>
+            </a:r>
+          </a:p>
+          <a:p>
+            <a:pPr>
+              <a:spcAft>
+                <a:spcPts val="600"/>
+              </a:spcAft>
+            </a:pPr>
+            <a:r>
+              <a:rPr sz="1500">
+                <a:solidFill>
+                  <a:srgbClr val="22282E"/>
+                </a:solidFill>
+              </a:rPr>
+              <a:t>•  Filtro de visualización — Expresión booleana sobre campos disecados; oculta paquetes</a:t>
+            </a:r>
+          </a:p>
+          <a:p>
+            <a:pPr>
+              <a:spcAft>
+                <a:spcPts val="600"/>
+              </a:spcAft>
+            </a:pPr>
+            <a:r>
+              <a:rPr sz="1500">
+                <a:solidFill>
+                  <a:srgbClr val="22282E"/>
+                </a:solidFill>
+              </a:rPr>
+              <a:t>•  Campo de protocolo — Dato direccionable de una cabecera (ip.src, tcp.flags.syn)</a:t>
+            </a:r>
+          </a:p>
+          <a:p>
+            <a:pPr>
+              <a:spcAft>
+                <a:spcPts val="600"/>
+              </a:spcAft>
+            </a:pPr>
+            <a:r>
+              <a:rPr sz="1500">
+                <a:solidFill>
+                  <a:srgbClr val="22282E"/>
+                </a:solidFill>
+              </a:rPr>
+              <a:t>•  contains / matches — Operadores de subcadena y de expresión regular</a:t>
+            </a:r>
+          </a:p>
+          <a:p>
+            <a:pPr>
+              <a:spcAft>
+                <a:spcPts val="600"/>
+              </a:spcAft>
+            </a:pPr>
+            <a:r>
+              <a:rPr sz="1500">
+                <a:solidFill>
+                  <a:srgbClr val="22282E"/>
+                </a:solidFill>
+              </a:rPr>
+              <a:t>•  Follow Stream — Reensamblado de una conversación completa en orden</a:t>
+            </a:r>
+          </a:p>
+          <a:p>
+            <a:pPr>
+              <a:spcAft>
+                <a:spcPts val="600"/>
+              </a:spcAft>
+            </a:pPr>
+            <a:r>
+              <a:rPr sz="1500">
+                <a:solidFill>
+                  <a:srgbClr val="22282E"/>
+                </a:solidFill>
+              </a:rPr>
+              <a:t>•  tcp.stream — Índice que identifica cada conversación TCP de la captura</a:t>
+            </a:r>
+          </a:p>
+          <a:p>
+            <a:pPr>
+              <a:spcAft>
+                <a:spcPts val="600"/>
+              </a:spcAft>
+            </a:pPr>
+            <a:r>
+              <a:rPr sz="1500">
+                <a:solidFill>
+                  <a:srgbClr val="22282E"/>
+                </a:solidFill>
+              </a:rPr>
+              <a:t>•  Conversations — Estadística por pares de interlocutores (bytes, paquetes, duración)</a:t>
             </a:r>
           </a:p>
         </p:txBody>
@@ -4614,7 +4975,7 @@
                   <a:srgbClr val="0B3D2E"/>
                 </a:solidFill>
               </a:rPr>
-              <a:t>✍️ Ejercicios</a:t>
+              <a:t>🧰 Herramientas y preparación</a:t>
             </a:r>
           </a:p>
         </p:txBody>
@@ -4652,82 +5013,37 @@
                   <a:srgbClr val="22282E"/>
                 </a:solidFill>
               </a:rPr>
-              <a:t>•  Escribe un filtro que muestre solo tráfico TLS handshake (tls.handshake.type == 1).</a:t>
-            </a:r>
-          </a:p>
-          <a:p>
-            <a:pPr>
-              <a:spcAft>
-                <a:spcPts val="600"/>
-              </a:spcAft>
-            </a:pPr>
-            <a:r>
-              <a:rPr sz="1500">
-                <a:solidFill>
-                  <a:srgbClr val="22282E"/>
-                </a:solidFill>
-              </a:rPr>
-              <a:t>•  Encuentra todas las conversaciones que superen 100 KB y anótalas.</a:t>
-            </a:r>
-          </a:p>
-          <a:p>
-            <a:pPr>
-              <a:spcAft>
-                <a:spcPts val="600"/>
-              </a:spcAft>
-            </a:pPr>
-            <a:r>
-              <a:rPr sz="1500">
-                <a:solidFill>
-                  <a:srgbClr val="22282E"/>
-                </a:solidFill>
-              </a:rPr>
-              <a:t>•  Usa tcp.analysis.flags para listar todos los eventos de análisis de la captura.</a:t>
-            </a:r>
-          </a:p>
-          <a:p>
-            <a:pPr>
-              <a:spcAft>
-                <a:spcPts val="600"/>
-              </a:spcAft>
-            </a:pPr>
-            <a:r>
-              <a:rPr sz="1500">
-                <a:solidFill>
-                  <a:srgbClr val="22282E"/>
-                </a:solidFill>
-              </a:rPr>
-              <a:t>•  Con Follow HTTP Stream, extrae el Server: de la respuesta de un sitio.</a:t>
-            </a:r>
-          </a:p>
-          <a:p>
-            <a:pPr>
-              <a:spcAft>
-                <a:spcPts val="600"/>
-              </a:spcAft>
-            </a:pPr>
-            <a:r>
-              <a:rPr sz="1500">
-                <a:solidFill>
-                  <a:srgbClr val="22282E"/>
-                </a:solidFill>
-              </a:rPr>
-              <a:t>•  Calcula el RTT medio de un flujo añadiendo la columna tcp.analysis.ackrtt.</a:t>
-            </a:r>
-          </a:p>
-          <a:p>
-            <a:pPr>
-              <a:spcAft>
-                <a:spcPts val="600"/>
-              </a:spcAft>
-            </a:pPr>
-            <a:r>
-              <a:rPr sz="1500">
-                <a:solidFill>
-                  <a:srgbClr val="22282E"/>
-                </a:solidFill>
-              </a:rPr>
-              <a:t>•  Reproduce la tabla de Endpoints en consola: tshark -r lab027.pcapng -q -z endpoints,ip.</a:t>
+              <a:t>•  Wireshark 4.x y su binario de consola tshark.</a:t>
+            </a:r>
+          </a:p>
+          <a:p>
+            <a:pPr>
+              <a:spcAft>
+                <a:spcPts val="600"/>
+              </a:spcAft>
+            </a:pPr>
+            <a:r>
+              <a:rPr sz="1500">
+                <a:solidFill>
+                  <a:srgbClr val="22282E"/>
+                </a:solidFill>
+              </a:rPr>
+              <a:t>•  Una captura de práctica con varios flujos. Puedes generar una así en tu laboratorio:</a:t>
+            </a:r>
+          </a:p>
+          <a:p>
+            <a:pPr>
+              <a:spcAft>
+                <a:spcPts val="600"/>
+              </a:spcAft>
+            </a:pPr>
+            <a:r>
+              <a:rPr sz="1500">
+                <a:solidFill>
+                  <a:srgbClr val="22282E"/>
+                </a:solidFill>
+              </a:rPr>
+              <a:t>•  Referencia de campos: &lt;https://www.wireshark.org/docs/dfref/&gt;.</a:t>
             </a:r>
           </a:p>
         </p:txBody>
@@ -4778,7 +5094,7 @@
                   <a:srgbClr val="0B3D2E"/>
                 </a:solidFill>
               </a:rPr>
-              <a:t>📝 Reto verificable</a:t>
+              <a:t>🧪 Laboratorio guiado</a:t>
             </a:r>
           </a:p>
         </p:txBody>
@@ -4816,22 +5132,97 @@
                   <a:srgbClr val="22282E"/>
                 </a:solidFill>
               </a:rPr>
-              <a:t>•  Dada una captura con al menos 5 conversaciones, entrega un informe corto (media página) que identifique: la conversación con más bytes, el número de retransmisiones totales, el protocolo de aplicación dominante y una captura de pantalla del I/O Graph. Adjunta también el comando tshark que usaste para verificar el conteo de retransmisiones.</a:t>
-            </a:r>
-          </a:p>
-          <a:p>
-            <a:pPr>
-              <a:spcAft>
-                <a:spcPts val="600"/>
-              </a:spcAft>
-            </a:pPr>
-            <a:r>
-              <a:rPr sz="1500">
-                <a:solidFill>
-                  <a:srgbClr val="22282E"/>
-                </a:solidFill>
-              </a:rPr>
-              <a:t>•  Criterio de aceptación: los números del informe coinciden con los que el revisor obtiene al aplicar tcp.analysis.retransmission y abrir la tabla de Conversaciones sobre la misma captura.</a:t>
+              <a:t>•  Abre lab027.pcapng. Aplica el filtro dns y observa consultas y respuestas.</a:t>
+            </a:r>
+          </a:p>
+          <a:p>
+            <a:pPr>
+              <a:spcAft>
+                <a:spcPts val="600"/>
+              </a:spcAft>
+            </a:pPr>
+            <a:r>
+              <a:rPr sz="1500">
+                <a:solidFill>
+                  <a:srgbClr val="22282E"/>
+                </a:solidFill>
+              </a:rPr>
+              <a:t>•  Filtra por método HTTP: http.request.method == "GET".</a:t>
+            </a:r>
+          </a:p>
+          <a:p>
+            <a:pPr>
+              <a:spcAft>
+                <a:spcPts val="600"/>
+              </a:spcAft>
+            </a:pPr>
+            <a:r>
+              <a:rPr sz="1500">
+                <a:solidFill>
+                  <a:srgbClr val="22282E"/>
+                </a:solidFill>
+              </a:rPr>
+              <a:t>•  Combina condiciones: ip.addr == 192.168.56.101 &amp;&amp; tcp.flags.syn == 1 &amp;&amp; tcp.flags.ack == 0 para ver intentos de conexión salientes.</a:t>
+            </a:r>
+          </a:p>
+          <a:p>
+            <a:pPr>
+              <a:spcAft>
+                <a:spcPts val="600"/>
+              </a:spcAft>
+            </a:pPr>
+            <a:r>
+              <a:rPr sz="1500">
+                <a:solidFill>
+                  <a:srgbClr val="22282E"/>
+                </a:solidFill>
+              </a:rPr>
+              <a:t>•  Sobre un paquete HTTP, clic derecho → Follow → HTTP Stream. Lee petición y respuesta reensambladas (cliente en rojo, servidor en azul).</a:t>
+            </a:r>
+          </a:p>
+          <a:p>
+            <a:pPr>
+              <a:spcAft>
+                <a:spcPts val="600"/>
+              </a:spcAft>
+            </a:pPr>
+            <a:r>
+              <a:rPr sz="1500">
+                <a:solidFill>
+                  <a:srgbClr val="22282E"/>
+                </a:solidFill>
+              </a:rPr>
+              <a:t>•  Cambia a Follow → TCP Stream del mismo flujo para ver bytes crudos y el tcp.stream asociado.</a:t>
+            </a:r>
+          </a:p>
+          <a:p>
+            <a:pPr>
+              <a:spcAft>
+                <a:spcPts val="600"/>
+              </a:spcAft>
+            </a:pPr>
+            <a:r>
+              <a:rPr sz="1500">
+                <a:solidFill>
+                  <a:srgbClr val="22282E"/>
+                </a:solidFill>
+              </a:rPr>
+              <a:t>•  Abre Estadísticas → Conversaciones. Ordena por bytes; marca "Limit to display filter" para acotar.</a:t>
+            </a:r>
+          </a:p>
+          <a:p>
+            <a:pPr>
+              <a:spcAft>
+                <a:spcPts val="600"/>
+              </a:spcAft>
+            </a:pPr>
+            <a:r>
+              <a:rPr sz="1500">
+                <a:solidFill>
+                  <a:srgbClr val="22282E"/>
+                </a:solidFill>
+              </a:rPr>
+              <a:t>•  Abre Estadísticas → Jerarquía de protocolos y anota el porcentaje de cada protocolo.</a:t>
             </a:r>
           </a:p>
         </p:txBody>
